--- a/SLT/AI in Healthcare SLT Powerpoint.pptx
+++ b/SLT/AI in Healthcare SLT Powerpoint.pptx
@@ -5999,7 +5999,9 @@
           </a:xfrm>
         </p:spPr>
         <p:txBody>
-          <a:bodyPr/>
+          <a:bodyPr>
+            <a:normAutofit lnSpcReduction="10000"/>
+          </a:bodyPr>
           <a:lstStyle/>
           <a:p>
             <a:r>
@@ -6017,6 +6019,20 @@
             <a:r>
               <a:rPr lang="en-US" dirty="0"/>
               <a:t>10/2026</a:t>
+            </a:r>
+          </a:p>
+          <a:p>
+            <a:r>
+              <a:rPr lang="en-US" dirty="0"/>
+              <a:t>https://</a:t>
+            </a:r>
+            <a:r>
+              <a:rPr lang="en-US" dirty="0" err="1"/>
+              <a:t>github.com</a:t>
+            </a:r>
+            <a:r>
+              <a:rPr lang="en-US" dirty="0"/>
+              <a:t>/AIHfall2026/Self_Learning_Tutorial_Fall_2026/</a:t>
             </a:r>
           </a:p>
         </p:txBody>

--- a/SLT/AI in Healthcare SLT Powerpoint.pptx
+++ b/SLT/AI in Healthcare SLT Powerpoint.pptx
@@ -538,6 +538,47 @@
               <a:rPr lang="en-US" dirty="0"/>
               <a:t>In this tutorial, we look at the CDC’s 2023 linked birth/death infant data so that we can attempt to perform cluster analysis on preterm/premature births using a combination of different ML methods, e.g., K-Means, Gaussian Mixture Models. We also do survival analysis to see how the different groups of preterm babies survive over the course of their first year.</a:t>
             </a:r>
+          </a:p>
+          <a:p>
+            <a:endParaRPr lang="en-US" dirty="0"/>
+          </a:p>
+          <a:p>
+            <a:pPr marL="0" marR="0" lvl="0" indent="0" algn="l" defTabSz="914400" rtl="0" eaLnBrk="1" fontAlgn="auto" latinLnBrk="0" hangingPunct="1">
+              <a:lnSpc>
+                <a:spcPct val="100000"/>
+              </a:lnSpc>
+              <a:spcBef>
+                <a:spcPts val="0"/>
+              </a:spcBef>
+              <a:spcAft>
+                <a:spcPts val="0"/>
+              </a:spcAft>
+              <a:buClrTx/>
+              <a:buSzTx/>
+              <a:buFontTx/>
+              <a:buNone/>
+              <a:tabLst/>
+              <a:defRPr/>
+            </a:pPr>
+            <a:r>
+              <a:rPr lang="en-US" dirty="0" err="1"/>
+              <a:t>Github</a:t>
+            </a:r>
+            <a:r>
+              <a:rPr lang="en-US" dirty="0"/>
+              <a:t> repo: https://</a:t>
+            </a:r>
+            <a:r>
+              <a:rPr lang="en-US" dirty="0" err="1"/>
+              <a:t>github.com</a:t>
+            </a:r>
+            <a:r>
+              <a:rPr lang="en-US"/>
+              <a:t>/AIHfall2026/Self_Learning_Tutorial_Fall_2026/</a:t>
+            </a:r>
+          </a:p>
+          <a:p>
+            <a:endParaRPr lang="en-US" dirty="0"/>
           </a:p>
         </p:txBody>
       </p:sp>
@@ -6000,7 +6041,7 @@
         </p:spPr>
         <p:txBody>
           <a:bodyPr>
-            <a:normAutofit lnSpcReduction="10000"/>
+            <a:normAutofit/>
           </a:bodyPr>
           <a:lstStyle/>
           <a:p>
@@ -6019,20 +6060,6 @@
             <a:r>
               <a:rPr lang="en-US" dirty="0"/>
               <a:t>10/2026</a:t>
-            </a:r>
-          </a:p>
-          <a:p>
-            <a:r>
-              <a:rPr lang="en-US" dirty="0"/>
-              <a:t>https://</a:t>
-            </a:r>
-            <a:r>
-              <a:rPr lang="en-US" dirty="0" err="1"/>
-              <a:t>github.com</a:t>
-            </a:r>
-            <a:r>
-              <a:rPr lang="en-US" dirty="0"/>
-              <a:t>/AIHfall2026/Self_Learning_Tutorial_Fall_2026/</a:t>
             </a:r>
           </a:p>
         </p:txBody>
